--- a/Kisan360_SIH26132_Idea_PPT_v2.pptx
+++ b/Kisan360_SIH26132_Idea_PPT_v2.pptx
@@ -5,7 +5,7 @@
     <p:sldMasterId id="2147483648" r:id="rId1"/>
   </p:sldMasterIdLst>
   <p:notesMasterIdLst>
-    <p:notesMasterId r:id="rId9"/>
+    <p:notesMasterId r:id="rId8"/>
   </p:notesMasterIdLst>
   <p:sldIdLst>
     <p:sldId id="291" r:id="rId2"/>
@@ -261,7 +261,7 @@
             <a:fld id="{C4D5ADD5-2BBC-4A94-8F86-D9013941F742}" type="datetimeFigureOut">
               <a:rPr lang="en-US"/>
               <a:pPr/>
-              <a:t>6/2/2026</a:t>
+              <a:t>9/12/2026</a:t>
             </a:fld>
             <a:endParaRPr lang="en-US"/>
           </a:p>
@@ -1534,7 +1534,7 @@
           <a:p>
             <a:fld id="{E60792E3-D524-454C-8AFD-A91972900BCB}" type="datetime1">
               <a:rPr lang="en-US" smtClean="0"/>
-              <a:t>6/2/2026</a:t>
+              <a:t>9/12/2026</a:t>
             </a:fld>
             <a:endParaRPr lang="en-US"/>
           </a:p>
@@ -1716,7 +1716,7 @@
           <a:p>
             <a:fld id="{053C3A68-6922-42D3-8905-ECC2D82A3469}" type="datetime1">
               <a:rPr lang="en-US" smtClean="0"/>
-              <a:t>6/2/2026</a:t>
+              <a:t>9/12/2026</a:t>
             </a:fld>
             <a:endParaRPr lang="en-US"/>
           </a:p>
@@ -1908,7 +1908,7 @@
           <a:p>
             <a:fld id="{CB69E9F4-7604-4950-A8B2-8ACDEDB1506E}" type="datetime1">
               <a:rPr lang="en-US" smtClean="0"/>
-              <a:t>6/2/2026</a:t>
+              <a:t>9/12/2026</a:t>
             </a:fld>
             <a:endParaRPr lang="en-US"/>
           </a:p>
@@ -2090,7 +2090,7 @@
           <a:p>
             <a:fld id="{708B7524-32A2-4C20-A58C-BC3BAA1042FC}" type="datetime1">
               <a:rPr lang="en-US" smtClean="0"/>
-              <a:t>6/2/2026</a:t>
+              <a:t>9/12/2026</a:t>
             </a:fld>
             <a:endParaRPr lang="en-US"/>
           </a:p>
@@ -2349,7 +2349,7 @@
           <a:p>
             <a:fld id="{1E994447-D6B2-43BB-A877-57F1A267B999}" type="datetime1">
               <a:rPr lang="en-US" smtClean="0"/>
-              <a:t>6/2/2026</a:t>
+              <a:t>9/12/2026</a:t>
             </a:fld>
             <a:endParaRPr lang="en-US"/>
           </a:p>
@@ -2648,7 +2648,7 @@
           <a:p>
             <a:fld id="{68920E16-BD35-483C-AA6B-346FC7E46DEA}" type="datetime1">
               <a:rPr lang="en-US" smtClean="0"/>
-              <a:t>6/2/2026</a:t>
+              <a:t>9/12/2026</a:t>
             </a:fld>
             <a:endParaRPr lang="en-US"/>
           </a:p>
@@ -3081,7 +3081,7 @@
           <a:p>
             <a:fld id="{2FEAC6F8-5103-4FC0-A69E-5C6AE6469DA8}" type="datetime1">
               <a:rPr lang="en-US" smtClean="0"/>
-              <a:t>6/2/2026</a:t>
+              <a:t>9/12/2026</a:t>
             </a:fld>
             <a:endParaRPr lang="en-US"/>
           </a:p>
@@ -3212,7 +3212,7 @@
           <a:p>
             <a:fld id="{C60C6921-0627-4C8F-83D5-0CF936D2FFDD}" type="datetime1">
               <a:rPr lang="en-US" smtClean="0"/>
-              <a:t>6/2/2026</a:t>
+              <a:t>9/12/2026</a:t>
             </a:fld>
             <a:endParaRPr lang="en-US"/>
           </a:p>
@@ -3321,7 +3321,7 @@
           <a:p>
             <a:fld id="{2FF08AD7-8103-40F8-983C-E2BA6BB9CBE0}" type="datetime1">
               <a:rPr lang="en-US" smtClean="0"/>
-              <a:t>6/2/2026</a:t>
+              <a:t>9/12/2026</a:t>
             </a:fld>
             <a:endParaRPr lang="en-US"/>
           </a:p>
@@ -3610,7 +3610,7 @@
           <a:p>
             <a:fld id="{DF8C06B4-9380-4A4D-AF49-A3596E17DAF5}" type="datetime1">
               <a:rPr lang="en-US" smtClean="0"/>
-              <a:t>6/2/2026</a:t>
+              <a:t>9/12/2026</a:t>
             </a:fld>
             <a:endParaRPr lang="en-US"/>
           </a:p>
@@ -3879,7 +3879,7 @@
           <a:p>
             <a:fld id="{EF7FDEF1-C582-4E22-9E77-D68326471F28}" type="datetime1">
               <a:rPr lang="en-US" smtClean="0"/>
-              <a:t>6/2/2026</a:t>
+              <a:t>9/12/2026</a:t>
             </a:fld>
             <a:endParaRPr lang="en-US"/>
           </a:p>
@@ -4122,7 +4122,7 @@
           <a:p>
             <a:fld id="{780A9602-A9A9-453F-AEF1-37B5837E02CD}" type="datetime1">
               <a:rPr lang="en-US" smtClean="0"/>
-              <a:t>6/2/2026</a:t>
+              <a:t>9/12/2026</a:t>
             </a:fld>
             <a:endParaRPr lang="en-US"/>
           </a:p>
@@ -4673,7 +4673,7 @@
                 <a16:creationId xmlns:a16="http://schemas.microsoft.com/office/drawing/2014/main" id="{3E443FD7-A66B-4AA0-872D-B088B9BC5F17}"/>
               </a:ext>
               <a:ext uri="{C183D7F6-B498-43B3-948B-1728B52AA6E4}">
-                <adec:decorative xmlns:adec="http://schemas.microsoft.com/office/drawing/2017/decorative" xmlns="" val="1"/>
+                <adec:decorative xmlns:adec="http://schemas.microsoft.com/office/drawing/2017/decorative" val="1"/>
               </a:ext>
             </a:extLst>
           </p:cNvPr>
@@ -4733,7 +4733,7 @@
                 <a16:creationId xmlns:a16="http://schemas.microsoft.com/office/drawing/2014/main" id="{C04BE0EF-3561-49B4-9A29-F283168A91C7}"/>
               </a:ext>
               <a:ext uri="{C183D7F6-B498-43B3-948B-1728B52AA6E4}">
-                <adec:decorative xmlns:adec="http://schemas.microsoft.com/office/drawing/2017/decorative" xmlns="" val="1"/>
+                <adec:decorative xmlns:adec="http://schemas.microsoft.com/office/drawing/2017/decorative" val="1"/>
               </a:ext>
             </a:extLst>
           </p:cNvPr>
@@ -5530,55 +5530,6 @@
       </p:pic>
       <p:sp>
         <p:nvSpPr>
-          <p:cNvPr id="4" name="Subtitle 3"/>
-          <p:cNvSpPr>
-            <a:spLocks noGrp="1"/>
-          </p:cNvSpPr>
-          <p:nvPr>
-            <p:ph type="subTitle" idx="1"/>
-          </p:nvPr>
-        </p:nvSpPr>
-        <p:spPr>
-          <a:xfrm>
-            <a:off x="1245686" y="648614"/>
-            <a:ext cx="8534400" cy="1752600"/>
-          </a:xfrm>
-        </p:spPr>
-        <p:txBody>
-          <a:bodyPr/>
-          <a:lstStyle/>
-          <a:p>
-            <a:endParaRPr lang="en-US" b="1" dirty="0">
-              <a:solidFill>
-                <a:schemeClr val="tx1"/>
-              </a:solidFill>
-              <a:latin typeface="Times New Roman" panose="02020603050405020304" pitchFamily="18" charset="0"/>
-              <a:cs typeface="Times New Roman" panose="02020603050405020304" pitchFamily="18" charset="0"/>
-            </a:endParaRPr>
-          </a:p>
-          <a:p>
-            <a:r>
-              <a:rPr lang="en-US" b="1" dirty="0">
-                <a:solidFill>
-                  <a:schemeClr val="tx1"/>
-                </a:solidFill>
-                <a:latin typeface="Times New Roman" panose="02020603050405020304" pitchFamily="18" charset="0"/>
-                <a:cs typeface="Times New Roman" panose="02020603050405020304" pitchFamily="18" charset="0"/>
-              </a:rPr>
-              <a:t>TITLE PAGE</a:t>
-            </a:r>
-            <a:endParaRPr lang="en-IN" b="1" dirty="0">
-              <a:solidFill>
-                <a:schemeClr val="tx1"/>
-              </a:solidFill>
-              <a:latin typeface="Times New Roman" panose="02020603050405020304" pitchFamily="18" charset="0"/>
-              <a:cs typeface="Times New Roman" panose="02020603050405020304" pitchFamily="18" charset="0"/>
-            </a:endParaRPr>
-          </a:p>
-        </p:txBody>
-      </p:sp>
-      <p:sp>
-        <p:nvSpPr>
           <p:cNvPr id="8" name="Title 7"/>
           <p:cNvSpPr>
             <a:spLocks noGrp="1"/>
@@ -5589,8 +5540,8 @@
         </p:nvSpPr>
         <p:spPr>
           <a:xfrm>
-            <a:off x="331286" y="-526757"/>
-            <a:ext cx="10363200" cy="2076450"/>
+            <a:off x="225760" y="171498"/>
+            <a:ext cx="7993656" cy="1279016"/>
           </a:xfrm>
         </p:spPr>
         <p:txBody>
@@ -5604,16 +5555,7 @@
                 </a:solidFill>
                 <a:latin typeface="Garamond" panose="02020404030301010803" pitchFamily="18" charset="0"/>
               </a:rPr>
-              <a:t>SMART INDIA HACKATHON </a:t>
-            </a:r>
-            <a:r>
-              <a:rPr lang="en-US" sz="4000" b="1" dirty="0" smtClean="0">
-                <a:solidFill>
-                  <a:schemeClr val="tx2"/>
-                </a:solidFill>
-                <a:latin typeface="Garamond" panose="02020404030301010803" pitchFamily="18" charset="0"/>
-              </a:rPr>
-              <a:t>2026</a:t>
+              <a:t>SMART INDIA HACKATHON 2026</a:t>
             </a:r>
             <a:endParaRPr lang="en-IN" sz="4000" b="1" dirty="0">
               <a:solidFill>
@@ -5652,13 +5594,13 @@
               </a:spcAft>
             </a:pPr>
             <a:r>
-              <a:rPr sz="1500" b="1">
+              <a:rPr sz="1500" b="1" dirty="0">
                 <a:latin typeface="Arial"/>
               </a:rPr>
               <a:t>Problem Statement ID : </a:t>
             </a:r>
             <a:r>
-              <a:rPr sz="1500">
+              <a:rPr sz="1500" dirty="0">
                 <a:latin typeface="Arial"/>
               </a:rPr>
               <a:t>26132</a:t>
@@ -5672,13 +5614,13 @@
               </a:spcAft>
             </a:pPr>
             <a:r>
-              <a:rPr sz="1500" b="1">
+              <a:rPr sz="1500" b="1" dirty="0">
                 <a:latin typeface="Arial"/>
               </a:rPr>
               <a:t>Problem Statement Title : </a:t>
             </a:r>
             <a:r>
-              <a:rPr sz="1500">
+              <a:rPr sz="1500" dirty="0">
                 <a:latin typeface="Arial"/>
               </a:rPr>
               <a:t>Strengthening market linkages and price discovery for farmers</a:t>
@@ -5691,16 +5633,28 @@
               </a:spcAft>
             </a:pPr>
             <a:r>
-              <a:rPr sz="1500" b="1">
+              <a:rPr sz="1500" b="1" dirty="0">
                 <a:latin typeface="Arial"/>
               </a:rPr>
               <a:t>Theme : </a:t>
             </a:r>
             <a:r>
-              <a:rPr sz="1500">
+              <a:rPr sz="1500" dirty="0">
                 <a:latin typeface="Arial"/>
               </a:rPr>
-              <a:t>Agriculture, FoodTech &amp; Rural Development</a:t>
+              <a:t>Agriculture, </a:t>
+            </a:r>
+            <a:r>
+              <a:rPr sz="1500" dirty="0" err="1">
+                <a:latin typeface="Arial"/>
+              </a:rPr>
+              <a:t>FoodTech</a:t>
+            </a:r>
+            <a:r>
+              <a:rPr sz="1500" dirty="0">
+                <a:latin typeface="Arial"/>
+              </a:rPr>
+              <a:t> &amp; Rural Development</a:t>
             </a:r>
           </a:p>
           <a:p>
@@ -5710,13 +5664,13 @@
               </a:spcAft>
             </a:pPr>
             <a:r>
-              <a:rPr sz="1500" b="1">
+              <a:rPr sz="1500" b="1" dirty="0">
                 <a:latin typeface="Arial"/>
               </a:rPr>
               <a:t>PS Category : </a:t>
             </a:r>
             <a:r>
-              <a:rPr sz="1500">
+              <a:rPr sz="1500" dirty="0">
                 <a:latin typeface="Arial"/>
               </a:rPr>
               <a:t>Software</a:t>
@@ -5729,13 +5683,13 @@
               </a:spcAft>
             </a:pPr>
             <a:r>
-              <a:rPr sz="1500" b="1">
+              <a:rPr sz="1500" b="1" dirty="0">
                 <a:latin typeface="Arial"/>
               </a:rPr>
               <a:t>Team ID : </a:t>
             </a:r>
             <a:r>
-              <a:rPr sz="1500">
+              <a:rPr sz="1500" dirty="0">
                 <a:latin typeface="Arial"/>
               </a:rPr>
               <a:t>TBD (update from portal)</a:t>
@@ -5748,13 +5702,13 @@
               </a:spcAft>
             </a:pPr>
             <a:r>
-              <a:rPr sz="1500" b="1">
+              <a:rPr sz="1500" b="1" dirty="0">
                 <a:latin typeface="Arial"/>
               </a:rPr>
               <a:t>Team Name : </a:t>
             </a:r>
             <a:r>
-              <a:rPr sz="1500">
+              <a:rPr sz="1500" dirty="0">
                 <a:latin typeface="Arial"/>
               </a:rPr>
               <a:t>Kisan360  |  CMR University</a:t>
@@ -5798,7 +5752,13 @@
           <p:cNvGraphicFramePr>
             <a:graphicFrameLocks noGrp="1"/>
           </p:cNvGraphicFramePr>
-          <p:nvPr/>
+          <p:nvPr>
+            <p:extLst>
+              <p:ext uri="{D42A27DB-BD31-4B8C-83A1-F6EECF244321}">
+                <p14:modId xmlns:p14="http://schemas.microsoft.com/office/powerpoint/2010/main" val="269761413"/>
+              </p:ext>
+            </p:extLst>
+          </p:nvPr>
         </p:nvGraphicFramePr>
         <p:xfrm>
           <a:off x="365760" y="4480560"/>
@@ -5811,9 +5771,27 @@
                 <a:tableStyleId>{5C22544A-7EE6-4342-B048-85BDC9FD1C3A}</a:tableStyleId>
               </a:tblPr>
               <a:tblGrid>
-                <a:gridCol w="3108960"/>
-                <a:gridCol w="1371600"/>
-                <a:gridCol w="1280160"/>
+                <a:gridCol w="3108960">
+                  <a:extLst>
+                    <a:ext uri="{9D8B030D-6E8A-4147-A177-3AD203B41FA5}">
+                      <a16:colId xmlns:a16="http://schemas.microsoft.com/office/drawing/2014/main" val="20000"/>
+                    </a:ext>
+                  </a:extLst>
+                </a:gridCol>
+                <a:gridCol w="1371600">
+                  <a:extLst>
+                    <a:ext uri="{9D8B030D-6E8A-4147-A177-3AD203B41FA5}">
+                      <a16:colId xmlns:a16="http://schemas.microsoft.com/office/drawing/2014/main" val="20001"/>
+                    </a:ext>
+                  </a:extLst>
+                </a:gridCol>
+                <a:gridCol w="1280160">
+                  <a:extLst>
+                    <a:ext uri="{9D8B030D-6E8A-4147-A177-3AD203B41FA5}">
+                      <a16:colId xmlns:a16="http://schemas.microsoft.com/office/drawing/2014/main" val="20002"/>
+                    </a:ext>
+                  </a:extLst>
+                </a:gridCol>
               </a:tblGrid>
               <a:tr h="262890">
                 <a:tc>
@@ -5882,6 +5860,11 @@
                     </a:solidFill>
                   </a:tcPr>
                 </a:tc>
+                <a:extLst>
+                  <a:ext uri="{0D108BD9-81ED-4DB2-BD59-A6C34878D82A}">
+                    <a16:rowId xmlns:a16="http://schemas.microsoft.com/office/drawing/2014/main" val="10000"/>
+                  </a:ext>
+                </a:extLst>
               </a:tr>
               <a:tr h="262890">
                 <a:tc>
@@ -5938,6 +5921,11 @@
                   </a:txBody>
                   <a:tcPr/>
                 </a:tc>
+                <a:extLst>
+                  <a:ext uri="{0D108BD9-81ED-4DB2-BD59-A6C34878D82A}">
+                    <a16:rowId xmlns:a16="http://schemas.microsoft.com/office/drawing/2014/main" val="10001"/>
+                  </a:ext>
+                </a:extLst>
               </a:tr>
               <a:tr h="262890">
                 <a:tc>
@@ -5994,6 +5982,11 @@
                   </a:txBody>
                   <a:tcPr/>
                 </a:tc>
+                <a:extLst>
+                  <a:ext uri="{0D108BD9-81ED-4DB2-BD59-A6C34878D82A}">
+                    <a16:rowId xmlns:a16="http://schemas.microsoft.com/office/drawing/2014/main" val="10002"/>
+                  </a:ext>
+                </a:extLst>
               </a:tr>
               <a:tr h="262890">
                 <a:tc>
@@ -6050,6 +6043,11 @@
                   </a:txBody>
                   <a:tcPr/>
                 </a:tc>
+                <a:extLst>
+                  <a:ext uri="{0D108BD9-81ED-4DB2-BD59-A6C34878D82A}">
+                    <a16:rowId xmlns:a16="http://schemas.microsoft.com/office/drawing/2014/main" val="10003"/>
+                  </a:ext>
+                </a:extLst>
               </a:tr>
               <a:tr h="262890">
                 <a:tc>
@@ -6106,6 +6104,11 @@
                   </a:txBody>
                   <a:tcPr/>
                 </a:tc>
+                <a:extLst>
+                  <a:ext uri="{0D108BD9-81ED-4DB2-BD59-A6C34878D82A}">
+                    <a16:rowId xmlns:a16="http://schemas.microsoft.com/office/drawing/2014/main" val="10004"/>
+                  </a:ext>
+                </a:extLst>
               </a:tr>
               <a:tr h="262890">
                 <a:tc>
@@ -6162,6 +6165,11 @@
                   </a:txBody>
                   <a:tcPr/>
                 </a:tc>
+                <a:extLst>
+                  <a:ext uri="{0D108BD9-81ED-4DB2-BD59-A6C34878D82A}">
+                    <a16:rowId xmlns:a16="http://schemas.microsoft.com/office/drawing/2014/main" val="10005"/>
+                  </a:ext>
+                </a:extLst>
               </a:tr>
               <a:tr h="262890">
                 <a:tc>
@@ -6218,6 +6226,11 @@
                   </a:txBody>
                   <a:tcPr/>
                 </a:tc>
+                <a:extLst>
+                  <a:ext uri="{0D108BD9-81ED-4DB2-BD59-A6C34878D82A}">
+                    <a16:rowId xmlns:a16="http://schemas.microsoft.com/office/drawing/2014/main" val="10006"/>
+                  </a:ext>
+                </a:extLst>
               </a:tr>
               <a:tr h="262890">
                 <a:tc>
@@ -6244,14 +6257,20 @@
                     <a:lstStyle/>
                     <a:p>
                       <a:r>
-                        <a:rPr sz="1100" b="0">
+                        <a:rPr lang="en-IN" sz="1100" b="0" dirty="0">
                           <a:solidFill>
                             <a:srgbClr val="262626"/>
                           </a:solidFill>
                           <a:latin typeface="Arial"/>
                         </a:rPr>
-                        <a:t>-</a:t>
+                        <a:t>CSE</a:t>
                       </a:r>
+                      <a:endParaRPr sz="1100" b="0" dirty="0">
+                        <a:solidFill>
+                          <a:srgbClr val="262626"/>
+                        </a:solidFill>
+                        <a:latin typeface="Arial"/>
+                      </a:endParaRPr>
                     </a:p>
                   </a:txBody>
                   <a:tcPr/>
@@ -6262,18 +6281,29 @@
                     <a:lstStyle/>
                     <a:p>
                       <a:r>
-                        <a:rPr sz="1100" b="0">
+                        <a:rPr lang="en-IN" sz="1100" b="0" dirty="0">
                           <a:solidFill>
                             <a:srgbClr val="262626"/>
                           </a:solidFill>
                           <a:latin typeface="Arial"/>
                         </a:rPr>
-                        <a:t>-</a:t>
+                        <a:t>F</a:t>
                       </a:r>
+                      <a:endParaRPr sz="1100" b="0" dirty="0">
+                        <a:solidFill>
+                          <a:srgbClr val="262626"/>
+                        </a:solidFill>
+                        <a:latin typeface="Arial"/>
+                      </a:endParaRPr>
                     </a:p>
                   </a:txBody>
                   <a:tcPr/>
                 </a:tc>
+                <a:extLst>
+                  <a:ext uri="{0D108BD9-81ED-4DB2-BD59-A6C34878D82A}">
+                    <a16:rowId xmlns:a16="http://schemas.microsoft.com/office/drawing/2014/main" val="10007"/>
+                  </a:ext>
+                </a:extLst>
               </a:tr>
             </a:tbl>
           </a:graphicData>
@@ -6407,7 +6437,8 @@
           <a:lstStyle/>
           <a:p>
             <a:r>
-              <a:t>IDEA TITLE — Kisan360: net-realization engine + market linkage</a:t>
+              <a:rPr dirty="0"/>
+              <a:t>Kisan360: net-realization engine + market linkage</a:t>
             </a:r>
           </a:p>
         </p:txBody>
@@ -6450,7 +6481,7 @@
               <a:buChar char="v"/>
             </a:pPr>
             <a:r>
-              <a:rPr sz="1900" b="1">
+              <a:rPr sz="1900" b="1" dirty="0">
                 <a:solidFill>
                   <a:srgbClr val="1F3864"/>
                 </a:solidFill>
@@ -6473,7 +6504,7 @@
               </a:spcAft>
             </a:pPr>
             <a:r>
-              <a:rPr sz="1300" b="0">
+              <a:rPr sz="1300" b="0" dirty="0">
                 <a:solidFill>
                   <a:srgbClr val="262626"/>
                 </a:solidFill>
@@ -6489,7 +6520,7 @@
               </a:spcAft>
             </a:pPr>
             <a:r>
-              <a:rPr sz="1900" b="1">
+              <a:rPr sz="1900" b="1" dirty="0">
                 <a:solidFill>
                   <a:srgbClr val="1F3864"/>
                 </a:solidFill>
@@ -6505,7 +6536,7 @@
               </a:spcAft>
             </a:pPr>
             <a:r>
-              <a:rPr sz="1300" b="0">
+              <a:rPr sz="1300" b="0" dirty="0">
                 <a:solidFill>
                   <a:srgbClr val="262626"/>
                 </a:solidFill>
@@ -6521,7 +6552,7 @@
               </a:spcAft>
             </a:pPr>
             <a:r>
-              <a:rPr sz="1300" b="0">
+              <a:rPr sz="1300" b="0" dirty="0">
                 <a:solidFill>
                   <a:srgbClr val="262626"/>
                 </a:solidFill>
@@ -6537,7 +6568,7 @@
               </a:spcAft>
             </a:pPr>
             <a:r>
-              <a:rPr sz="1900" b="1">
+              <a:rPr sz="1900" b="1" dirty="0">
                 <a:solidFill>
                   <a:srgbClr val="1F3864"/>
                 </a:solidFill>
@@ -6553,7 +6584,7 @@
               </a:spcAft>
             </a:pPr>
             <a:r>
-              <a:rPr sz="1300" b="0">
+              <a:rPr sz="1300" b="0" dirty="0">
                 <a:solidFill>
                   <a:srgbClr val="262626"/>
                 </a:solidFill>
@@ -6632,54 +6663,6 @@
                 <a:schemeClr val="bg1"/>
               </a:solidFill>
             </a:endParaRPr>
-          </a:p>
-        </p:txBody>
-      </p:sp>
-      <p:sp>
-        <p:nvSpPr>
-          <p:cNvPr id="10" name="Oval 9" descr="Your startup LOGO">
-            <a:extLst>
-              <a:ext uri="{FF2B5EF4-FFF2-40B4-BE49-F238E27FC236}">
-                <a16:creationId xmlns:a16="http://schemas.microsoft.com/office/drawing/2014/main" id="{5DBCE864-823D-4A13-9607-5DA1F0ED5FB8}"/>
-              </a:ext>
-              <a:ext uri="{C183D7F6-B498-43B3-948B-1728B52AA6E4}">
-                <adec:decorative xmlns:adec="http://schemas.microsoft.com/office/drawing/2017/decorative" xmlns="" val="0"/>
-              </a:ext>
-            </a:extLst>
-          </p:cNvPr>
-          <p:cNvSpPr/>
-          <p:nvPr/>
-        </p:nvSpPr>
-        <p:spPr>
-          <a:xfrm>
-            <a:off x="329773" y="252246"/>
-            <a:ext cx="1251857" cy="807334"/>
-          </a:xfrm>
-          <a:prstGeom prst="ellipse">
-            <a:avLst/>
-          </a:prstGeom>
-        </p:spPr>
-        <p:style>
-          <a:lnRef idx="2">
-            <a:schemeClr val="accent4"/>
-          </a:lnRef>
-          <a:fillRef idx="1">
-            <a:schemeClr val="lt1"/>
-          </a:fillRef>
-          <a:effectRef idx="0">
-            <a:schemeClr val="accent4"/>
-          </a:effectRef>
-          <a:fontRef idx="minor">
-            <a:schemeClr val="dk1"/>
-          </a:fontRef>
-        </p:style>
-        <p:txBody>
-          <a:bodyPr rtlCol="0" anchor="ctr"/>
-          <a:lstStyle/>
-          <a:p>
-            <a:r>
-              <a:t>Kisan360</a:t>
-            </a:r>
           </a:p>
         </p:txBody>
       </p:sp>
@@ -6729,8 +6712,8 @@
         </p:blipFill>
         <p:spPr>
           <a:xfrm>
-            <a:off x="11631168" y="6327648"/>
-            <a:ext cx="411480" cy="411480"/>
+            <a:off x="162064" y="213182"/>
+            <a:ext cx="655816" cy="655816"/>
           </a:xfrm>
           <a:prstGeom prst="rect">
             <a:avLst/>
@@ -6989,7 +6972,7 @@
                 <a16:creationId xmlns:a16="http://schemas.microsoft.com/office/drawing/2014/main" id="{5DBCE864-823D-4A13-9607-5DA1F0ED5FB8}"/>
               </a:ext>
               <a:ext uri="{C183D7F6-B498-43B3-948B-1728B52AA6E4}">
-                <adec:decorative xmlns:adec="http://schemas.microsoft.com/office/drawing/2017/decorative" xmlns="" val="0"/>
+                <adec:decorative xmlns:adec="http://schemas.microsoft.com/office/drawing/2017/decorative" val="0"/>
               </a:ext>
             </a:extLst>
           </p:cNvPr>
@@ -7119,7 +7102,7 @@
           </a:fontRef>
         </p:style>
         <p:txBody>
-          <a:bodyPr rtlCol="0" anchor="ctr" wrap="square"/>
+          <a:bodyPr wrap="square" rtlCol="0" anchor="ctr"/>
           <a:lstStyle/>
           <a:p>
             <a:pPr algn="ctr"/>
@@ -7206,7 +7189,7 @@
           </a:fontRef>
         </p:style>
         <p:txBody>
-          <a:bodyPr rtlCol="0" anchor="ctr" wrap="square"/>
+          <a:bodyPr wrap="square" rtlCol="0" anchor="ctr"/>
           <a:lstStyle/>
           <a:p>
             <a:pPr algn="ctr"/>
@@ -7293,7 +7276,7 @@
           </a:fontRef>
         </p:style>
         <p:txBody>
-          <a:bodyPr rtlCol="0" anchor="ctr" wrap="square"/>
+          <a:bodyPr wrap="square" rtlCol="0" anchor="ctr"/>
           <a:lstStyle/>
           <a:p>
             <a:pPr algn="ctr"/>
@@ -7380,7 +7363,7 @@
           </a:fontRef>
         </p:style>
         <p:txBody>
-          <a:bodyPr rtlCol="0" anchor="ctr" wrap="square"/>
+          <a:bodyPr wrap="square" rtlCol="0" anchor="ctr"/>
           <a:lstStyle/>
           <a:p>
             <a:pPr algn="ctr"/>
@@ -7467,7 +7450,7 @@
           </a:fontRef>
         </p:style>
         <p:txBody>
-          <a:bodyPr rtlCol="0" anchor="ctr" wrap="square"/>
+          <a:bodyPr wrap="square" rtlCol="0" anchor="ctr"/>
           <a:lstStyle/>
           <a:p>
             <a:pPr algn="ctr"/>
@@ -7554,7 +7537,7 @@
           </a:fontRef>
         </p:style>
         <p:txBody>
-          <a:bodyPr rtlCol="0" anchor="ctr" wrap="square"/>
+          <a:bodyPr wrap="square" rtlCol="0" anchor="ctr"/>
           <a:lstStyle/>
           <a:p>
             <a:pPr algn="ctr"/>
@@ -7608,7 +7591,7 @@
           </a:fontRef>
         </p:style>
         <p:txBody>
-          <a:bodyPr rtlCol="0" anchor="ctr" wrap="square"/>
+          <a:bodyPr wrap="square" rtlCol="0" anchor="ctr"/>
           <a:lstStyle/>
           <a:p>
             <a:pPr algn="ctr"/>
@@ -7698,7 +7681,7 @@
           </a:fontRef>
         </p:style>
         <p:txBody>
-          <a:bodyPr rtlCol="0" anchor="ctr" wrap="square"/>
+          <a:bodyPr wrap="square" rtlCol="0" anchor="ctr"/>
           <a:lstStyle/>
           <a:p>
             <a:pPr algn="ctr"/>
@@ -8070,6 +8053,7 @@
           <a:lstStyle/>
           <a:p>
             <a:r>
+              <a:rPr dirty="0"/>
               <a:t>FEASIBILITY AND VIABILITY</a:t>
             </a:r>
           </a:p>
@@ -8085,8 +8069,8 @@
         </p:nvSpPr>
         <p:spPr bwMode="auto">
           <a:xfrm>
-            <a:off x="274320" y="1143000"/>
-            <a:ext cx="6675120" cy="4937760"/>
+            <a:off x="274320" y="2482329"/>
+            <a:ext cx="6675120" cy="2598147"/>
           </a:xfrm>
           <a:prstGeom prst="rect">
             <a:avLst/>
@@ -8105,7 +8089,7 @@
           </a:bodyPr>
           <a:lstStyle/>
           <a:p>
-            <a:pPr marL="342900" marR="0" indent="-342900" algn="just" defTabSz="457200" rtl="0" eaLnBrk="1" fontAlgn="base" latinLnBrk="0" hangingPunct="1">
+            <a:pPr marR="0" algn="just" defTabSz="457200" rtl="0" eaLnBrk="1" fontAlgn="base" latinLnBrk="0" hangingPunct="1">
               <a:lnSpc>
                 <a:spcPct val="100000"/>
               </a:lnSpc>
@@ -8117,13 +8101,11 @@
               </a:spcAft>
               <a:buClrTx/>
               <a:buSzTx/>
-              <a:buFont typeface="Arial" panose="020B0604020202020204" pitchFamily="34" charset="0"/>
-              <a:buChar char="•"/>
               <a:tabLst/>
               <a:defRPr/>
             </a:pPr>
             <a:r>
-              <a:rPr sz="1900" b="1">
+              <a:rPr sz="1900" b="1" dirty="0">
                 <a:solidFill>
                   <a:srgbClr val="1F3864"/>
                 </a:solidFill>
@@ -8153,13 +8135,31 @@
               </a:spcAft>
             </a:pPr>
             <a:r>
-              <a:rPr sz="1300" b="0">
+              <a:rPr sz="1300" b="0" dirty="0">
                 <a:solidFill>
                   <a:srgbClr val="262626"/>
                 </a:solidFill>
                 <a:latin typeface="Arial"/>
               </a:rPr>
-              <a:t>Full journey clickable: dashboard → ranking → lot → offer → buyer accept → payment → receipt; deployable per-district over AGMARKNET/eNAM, nothing to replace.</a:t>
+              <a:t>Full journey clickable: dashboard → ranking → lot → offer → buyer accept → payment → receipt; deployable per-district over AGMARKNET/</a:t>
+            </a:r>
+            <a:r>
+              <a:rPr sz="1300" b="0" dirty="0" err="1">
+                <a:solidFill>
+                  <a:srgbClr val="262626"/>
+                </a:solidFill>
+                <a:latin typeface="Arial"/>
+              </a:rPr>
+              <a:t>eNAM</a:t>
+            </a:r>
+            <a:r>
+              <a:rPr sz="1300" b="0" dirty="0">
+                <a:solidFill>
+                  <a:srgbClr val="262626"/>
+                </a:solidFill>
+                <a:latin typeface="Arial"/>
+              </a:rPr>
+              <a:t>, nothing to replace.</a:t>
             </a:r>
           </a:p>
           <a:p>
@@ -8169,7 +8169,7 @@
               </a:spcAft>
             </a:pPr>
             <a:r>
-              <a:rPr sz="1900" b="1">
+              <a:rPr sz="1900" b="1" dirty="0">
                 <a:solidFill>
                   <a:srgbClr val="1F3864"/>
                 </a:solidFill>
@@ -8185,7 +8185,7 @@
               </a:spcAft>
             </a:pPr>
             <a:r>
-              <a:rPr sz="1300" b="0">
+              <a:rPr sz="1300" b="0" dirty="0">
                 <a:solidFill>
                   <a:srgbClr val="262626"/>
                 </a:solidFill>
@@ -8201,7 +8201,7 @@
               </a:spcAft>
             </a:pPr>
             <a:r>
-              <a:rPr sz="1300" b="0">
+              <a:rPr sz="1300" b="0" dirty="0">
                 <a:solidFill>
                   <a:srgbClr val="262626"/>
                 </a:solidFill>
@@ -8217,7 +8217,7 @@
               </a:spcAft>
             </a:pPr>
             <a:r>
-              <a:rPr sz="1300" b="0">
+              <a:rPr sz="1300" b="0" dirty="0">
                 <a:solidFill>
                   <a:srgbClr val="262626"/>
                 </a:solidFill>
@@ -8390,7 +8390,7 @@
                 <a16:creationId xmlns:a16="http://schemas.microsoft.com/office/drawing/2014/main" id="{5DBCE864-823D-4A13-9607-5DA1F0ED5FB8}"/>
               </a:ext>
               <a:ext uri="{C183D7F6-B498-43B3-948B-1728B52AA6E4}">
-                <adec:decorative xmlns:adec="http://schemas.microsoft.com/office/drawing/2017/decorative" xmlns="" val="0"/>
+                <adec:decorative xmlns:adec="http://schemas.microsoft.com/office/drawing/2017/decorative" val="0"/>
               </a:ext>
             </a:extLst>
           </p:cNvPr>
@@ -8994,7 +8994,7 @@
                 <a16:creationId xmlns:a16="http://schemas.microsoft.com/office/drawing/2014/main" id="{5DBCE864-823D-4A13-9607-5DA1F0ED5FB8}"/>
               </a:ext>
               <a:ext uri="{C183D7F6-B498-43B3-948B-1728B52AA6E4}">
-                <adec:decorative xmlns:adec="http://schemas.microsoft.com/office/drawing/2017/decorative" xmlns="" val="0"/>
+                <adec:decorative xmlns:adec="http://schemas.microsoft.com/office/drawing/2017/decorative" val="0"/>
               </a:ext>
             </a:extLst>
           </p:cNvPr>
@@ -9565,7 +9565,7 @@
                 <a16:creationId xmlns:a16="http://schemas.microsoft.com/office/drawing/2014/main" id="{5DBCE864-823D-4A13-9607-5DA1F0ED5FB8}"/>
               </a:ext>
               <a:ext uri="{C183D7F6-B498-43B3-948B-1728B52AA6E4}">
-                <adec:decorative xmlns:adec="http://schemas.microsoft.com/office/drawing/2017/decorative" xmlns="" val="0"/>
+                <adec:decorative xmlns:adec="http://schemas.microsoft.com/office/drawing/2017/decorative" val="0"/>
               </a:ext>
             </a:extLst>
           </p:cNvPr>

--- a/Kisan360_SIH26132_Idea_PPT_v2.pptx
+++ b/Kisan360_SIH26132_Idea_PPT_v2.pptx
@@ -161,6 +161,50 @@
 </p:presentation>
 </file>
 
+<file path=ppt/changesInfos/changesInfo1.xml><?xml version="1.0" encoding="utf-8"?>
+<pc:chgInfo xmlns:a="http://schemas.openxmlformats.org/drawingml/2006/main" xmlns:r="http://schemas.openxmlformats.org/officeDocument/2006/relationships" xmlns:ac="http://schemas.microsoft.com/office/drawing/2013/main/command" xmlns:pc="http://schemas.microsoft.com/office/powerpoint/2013/main/command">
+  <pc:docChgLst>
+    <pc:chgData name="Rian Hussain" userId="0caf0c85c763a54f" providerId="LiveId" clId="{8250069A-2DCE-4DE8-9693-3915BBE1E914}"/>
+    <pc:docChg chg="undo custSel modSld">
+      <pc:chgData name="Rian Hussain" userId="0caf0c85c763a54f" providerId="LiveId" clId="{8250069A-2DCE-4DE8-9693-3915BBE1E914}" dt="2026-09-13T11:23:32.230" v="2" actId="1076"/>
+      <pc:docMkLst>
+        <pc:docMk/>
+      </pc:docMkLst>
+      <pc:sldChg chg="modSp mod">
+        <pc:chgData name="Rian Hussain" userId="0caf0c85c763a54f" providerId="LiveId" clId="{8250069A-2DCE-4DE8-9693-3915BBE1E914}" dt="2026-09-13T11:23:32.230" v="2" actId="1076"/>
+        <pc:sldMkLst>
+          <pc:docMk/>
+          <pc:sldMk cId="0" sldId="281"/>
+        </pc:sldMkLst>
+        <pc:spChg chg="mod">
+          <ac:chgData name="Rian Hussain" userId="0caf0c85c763a54f" providerId="LiveId" clId="{8250069A-2DCE-4DE8-9693-3915BBE1E914}" dt="2026-09-13T11:23:32.230" v="2" actId="1076"/>
+          <ac:spMkLst>
+            <pc:docMk/>
+            <pc:sldMk cId="0" sldId="281"/>
+            <ac:spMk id="15361" creationId="{00000000-0000-0000-0000-000000000000}"/>
+          </ac:spMkLst>
+        </pc:spChg>
+      </pc:sldChg>
+      <pc:sldChg chg="modSp mod">
+        <pc:chgData name="Rian Hussain" userId="0caf0c85c763a54f" providerId="LiveId" clId="{8250069A-2DCE-4DE8-9693-3915BBE1E914}" dt="2026-09-13T11:22:53.744" v="1" actId="20577"/>
+        <pc:sldMkLst>
+          <pc:docMk/>
+          <pc:sldMk cId="0" sldId="290"/>
+        </pc:sldMkLst>
+        <pc:spChg chg="mod">
+          <ac:chgData name="Rian Hussain" userId="0caf0c85c763a54f" providerId="LiveId" clId="{8250069A-2DCE-4DE8-9693-3915BBE1E914}" dt="2026-09-13T11:22:53.744" v="1" actId="20577"/>
+          <ac:spMkLst>
+            <pc:docMk/>
+            <pc:sldMk cId="0" sldId="290"/>
+            <ac:spMk id="17428" creationId="{00000000-0000-0000-0000-000000000000}"/>
+          </ac:spMkLst>
+        </pc:spChg>
+      </pc:sldChg>
+    </pc:docChg>
+  </pc:docChgLst>
+</pc:chgInfo>
+</file>
+
 <file path=ppt/notesMasters/notesMaster1.xml><?xml version="1.0" encoding="utf-8"?>
 <p:notesMaster xmlns:a="http://schemas.openxmlformats.org/drawingml/2006/main" xmlns:r="http://schemas.openxmlformats.org/officeDocument/2006/relationships" xmlns:p="http://schemas.openxmlformats.org/presentationml/2006/main">
   <p:cSld>
@@ -261,7 +305,7 @@
             <a:fld id="{C4D5ADD5-2BBC-4A94-8F86-D9013941F742}" type="datetimeFigureOut">
               <a:rPr lang="en-US"/>
               <a:pPr/>
-              <a:t>9/12/2026</a:t>
+              <a:t>9/13/2026</a:t>
             </a:fld>
             <a:endParaRPr lang="en-US"/>
           </a:p>
@@ -1534,7 +1578,7 @@
           <a:p>
             <a:fld id="{E60792E3-D524-454C-8AFD-A91972900BCB}" type="datetime1">
               <a:rPr lang="en-US" smtClean="0"/>
-              <a:t>9/12/2026</a:t>
+              <a:t>9/13/2026</a:t>
             </a:fld>
             <a:endParaRPr lang="en-US"/>
           </a:p>
@@ -1716,7 +1760,7 @@
           <a:p>
             <a:fld id="{053C3A68-6922-42D3-8905-ECC2D82A3469}" type="datetime1">
               <a:rPr lang="en-US" smtClean="0"/>
-              <a:t>9/12/2026</a:t>
+              <a:t>9/13/2026</a:t>
             </a:fld>
             <a:endParaRPr lang="en-US"/>
           </a:p>
@@ -1908,7 +1952,7 @@
           <a:p>
             <a:fld id="{CB69E9F4-7604-4950-A8B2-8ACDEDB1506E}" type="datetime1">
               <a:rPr lang="en-US" smtClean="0"/>
-              <a:t>9/12/2026</a:t>
+              <a:t>9/13/2026</a:t>
             </a:fld>
             <a:endParaRPr lang="en-US"/>
           </a:p>
@@ -2090,7 +2134,7 @@
           <a:p>
             <a:fld id="{708B7524-32A2-4C20-A58C-BC3BAA1042FC}" type="datetime1">
               <a:rPr lang="en-US" smtClean="0"/>
-              <a:t>9/12/2026</a:t>
+              <a:t>9/13/2026</a:t>
             </a:fld>
             <a:endParaRPr lang="en-US"/>
           </a:p>
@@ -2349,7 +2393,7 @@
           <a:p>
             <a:fld id="{1E994447-D6B2-43BB-A877-57F1A267B999}" type="datetime1">
               <a:rPr lang="en-US" smtClean="0"/>
-              <a:t>9/12/2026</a:t>
+              <a:t>9/13/2026</a:t>
             </a:fld>
             <a:endParaRPr lang="en-US"/>
           </a:p>
@@ -2648,7 +2692,7 @@
           <a:p>
             <a:fld id="{68920E16-BD35-483C-AA6B-346FC7E46DEA}" type="datetime1">
               <a:rPr lang="en-US" smtClean="0"/>
-              <a:t>9/12/2026</a:t>
+              <a:t>9/13/2026</a:t>
             </a:fld>
             <a:endParaRPr lang="en-US"/>
           </a:p>
@@ -3081,7 +3125,7 @@
           <a:p>
             <a:fld id="{2FEAC6F8-5103-4FC0-A69E-5C6AE6469DA8}" type="datetime1">
               <a:rPr lang="en-US" smtClean="0"/>
-              <a:t>9/12/2026</a:t>
+              <a:t>9/13/2026</a:t>
             </a:fld>
             <a:endParaRPr lang="en-US"/>
           </a:p>
@@ -3212,7 +3256,7 @@
           <a:p>
             <a:fld id="{C60C6921-0627-4C8F-83D5-0CF936D2FFDD}" type="datetime1">
               <a:rPr lang="en-US" smtClean="0"/>
-              <a:t>9/12/2026</a:t>
+              <a:t>9/13/2026</a:t>
             </a:fld>
             <a:endParaRPr lang="en-US"/>
           </a:p>
@@ -3321,7 +3365,7 @@
           <a:p>
             <a:fld id="{2FF08AD7-8103-40F8-983C-E2BA6BB9CBE0}" type="datetime1">
               <a:rPr lang="en-US" smtClean="0"/>
-              <a:t>9/12/2026</a:t>
+              <a:t>9/13/2026</a:t>
             </a:fld>
             <a:endParaRPr lang="en-US"/>
           </a:p>
@@ -3610,7 +3654,7 @@
           <a:p>
             <a:fld id="{DF8C06B4-9380-4A4D-AF49-A3596E17DAF5}" type="datetime1">
               <a:rPr lang="en-US" smtClean="0"/>
-              <a:t>9/12/2026</a:t>
+              <a:t>9/13/2026</a:t>
             </a:fld>
             <a:endParaRPr lang="en-US"/>
           </a:p>
@@ -3879,7 +3923,7 @@
           <a:p>
             <a:fld id="{EF7FDEF1-C582-4E22-9E77-D68326471F28}" type="datetime1">
               <a:rPr lang="en-US" smtClean="0"/>
-              <a:t>9/12/2026</a:t>
+              <a:t>9/13/2026</a:t>
             </a:fld>
             <a:endParaRPr lang="en-US"/>
           </a:p>
@@ -4122,7 +4166,7 @@
           <a:p>
             <a:fld id="{780A9602-A9A9-453F-AEF1-37B5837E02CD}" type="datetime1">
               <a:rPr lang="en-US" smtClean="0"/>
-              <a:t>9/12/2026</a:t>
+              <a:t>9/13/2026</a:t>
             </a:fld>
             <a:endParaRPr lang="en-US"/>
           </a:p>
@@ -5692,7 +5736,7 @@
               <a:rPr sz="1500" dirty="0">
                 <a:latin typeface="Arial"/>
               </a:rPr>
-              <a:t>TBD (update from portal)</a:t>
+              <a:t>CMRU027</a:t>
             </a:r>
           </a:p>
           <a:p>
@@ -5712,6 +5756,43 @@
                 <a:latin typeface="Arial"/>
               </a:rPr>
               <a:t>Kisan360  |  CMR University</a:t>
+            </a:r>
+          </a:p>
+          <a:p>
+            <a:pPr>
+              <a:spcBef>
+                <a:spcPts val="600"/>
+              </a:spcBef>
+            </a:pPr>
+            <a:r>
+              <a:rPr sz="1200" b="1"/>
+              <a:t>Live demo — open in this order (free-tier services wake on first visit): </a:t>
+            </a:r>
+            <a:r>
+              <a:rPr sz="1100">
+                <a:hlinkClick r:id="rId5"/>
+              </a:rPr>
+              <a:t>1) calculator health</a:t>
+            </a:r>
+            <a:r>
+              <a:rPr sz="1100"/>
+              <a:t>  ·  </a:t>
+            </a:r>
+            <a:r>
+              <a:rPr sz="1100">
+                <a:hlinkClick r:id="rId6"/>
+              </a:rPr>
+              <a:t>2) API health</a:t>
+            </a:r>
+            <a:r>
+              <a:rPr sz="1100"/>
+              <a:t>  ·  </a:t>
+            </a:r>
+            <a:r>
+              <a:rPr sz="1100">
+                <a:hlinkClick r:id="rId7"/>
+              </a:rPr>
+              <a:t>3) the app</a:t>
             </a:r>
           </a:p>
         </p:txBody>
@@ -6428,7 +6509,7 @@
         </p:nvSpPr>
         <p:spPr>
           <a:xfrm>
-            <a:off x="182998" y="0"/>
+            <a:off x="162064" y="297498"/>
             <a:ext cx="10972800" cy="1143000"/>
           </a:xfrm>
         </p:spPr>
@@ -7693,7 +7774,7 @@
                 <a:latin typeface="Arial"/>
               </a:rPr>
               <a:t>FPO Pool
-50 q bulk</a:t>
+40 q bulk</a:t>
             </a:r>
           </a:p>
         </p:txBody>
@@ -7795,7 +7876,7 @@
               </a:spcAft>
             </a:pPr>
             <a:r>
-              <a:rPr sz="1900" b="1">
+              <a:rPr sz="1900" b="1" dirty="0">
                 <a:solidFill>
                   <a:srgbClr val="1F3864"/>
                 </a:solidFill>
@@ -7811,7 +7892,7 @@
               </a:spcAft>
             </a:pPr>
             <a:r>
-              <a:rPr sz="1200" b="0">
+              <a:rPr sz="1200" b="0" dirty="0">
                 <a:solidFill>
                   <a:srgbClr val="262626"/>
                 </a:solidFill>
@@ -7827,13 +7908,31 @@
               </a:spcAft>
             </a:pPr>
             <a:r>
-              <a:rPr sz="1200" b="0">
+              <a:rPr sz="1200" b="0" dirty="0">
                 <a:solidFill>
                   <a:srgbClr val="262626"/>
                 </a:solidFill>
                 <a:latin typeface="Arial"/>
               </a:rPr>
-              <a:t>Node/Express API — 22 routes; Python FastAPI: net-realization (:8002), disease CNN (:8000), advisory RAG (:8001).</a:t>
+              <a:t>Node/Express API — 22 routes; Python </a:t>
+            </a:r>
+            <a:r>
+              <a:rPr sz="1200" b="0" dirty="0" err="1">
+                <a:solidFill>
+                  <a:srgbClr val="262626"/>
+                </a:solidFill>
+                <a:latin typeface="Arial"/>
+              </a:rPr>
+              <a:t>FastAPI</a:t>
+            </a:r>
+            <a:r>
+              <a:rPr sz="1200" b="0" dirty="0">
+                <a:solidFill>
+                  <a:srgbClr val="262626"/>
+                </a:solidFill>
+                <a:latin typeface="Arial"/>
+              </a:rPr>
+              <a:t>: net-realization (:8002, deployed); disease + advisory degrade gracefully.</a:t>
             </a:r>
           </a:p>
           <a:p>
@@ -7843,13 +7942,31 @@
               </a:spcAft>
             </a:pPr>
             <a:r>
-              <a:rPr sz="1200" b="0">
+              <a:rPr sz="1200" b="0" dirty="0">
                 <a:solidFill>
                   <a:srgbClr val="262626"/>
                 </a:solidFill>
                 <a:latin typeface="Arial"/>
               </a:rPr>
-              <a:t>AGMARKNET live + stamped snapshot; MongoDB Atlas with memory fallback; Groq LLM explains only — never computes.</a:t>
+              <a:t>AGMARKNET live + stamped snapshot; MongoDB Atlas with memory fallback; </a:t>
+            </a:r>
+            <a:r>
+              <a:rPr sz="1200" b="0" dirty="0" err="1">
+                <a:solidFill>
+                  <a:srgbClr val="262626"/>
+                </a:solidFill>
+                <a:latin typeface="Arial"/>
+              </a:rPr>
+              <a:t>Groq</a:t>
+            </a:r>
+            <a:r>
+              <a:rPr sz="1200" b="0" dirty="0">
+                <a:solidFill>
+                  <a:srgbClr val="262626"/>
+                </a:solidFill>
+                <a:latin typeface="Arial"/>
+              </a:rPr>
+              <a:t> LLM explains only — never computes.</a:t>
             </a:r>
           </a:p>
           <a:p>
@@ -7859,13 +7976,13 @@
               </a:spcAft>
             </a:pPr>
             <a:r>
-              <a:rPr sz="1200" b="0">
+              <a:rPr sz="1200" b="0" dirty="0">
                 <a:solidFill>
                   <a:srgbClr val="262626"/>
                 </a:solidFill>
                 <a:latin typeface="Arial"/>
               </a:rPr>
-              <a:t>Quality bar: 575 tests green; one-command boot; TRL 6 prototype.</a:t>
+              <a:t>Quality bar: 577 tests green; one-command boot; TRL 6 prototype.</a:t>
             </a:r>
           </a:p>
         </p:txBody>
